--- a/presentation/토큰_절약_발표_본편.pptx
+++ b/presentation/토큰_절약_발표_본편.pptx
@@ -18353,7 +18353,7 @@
         <p:spPr>
           <a:xfrm>
             <a:off x="6492240" y="2212848"/>
-            <a:ext cx="5074920" cy="1316736"/>
+            <a:ext cx="5074920" cy="1188720"/>
           </a:xfrm>
           <a:prstGeom prst="roundRect">
             <a:avLst>
@@ -18399,7 +18399,7 @@
         <p:spPr>
           <a:xfrm>
             <a:off x="6492240" y="2212848"/>
-            <a:ext cx="50292" cy="1316736"/>
+            <a:ext cx="50292" cy="1188720"/>
           </a:xfrm>
           <a:prstGeom prst="rect">
             <a:avLst/>
@@ -18484,7 +18484,7 @@
         <p:spPr>
           <a:xfrm>
             <a:off x="6803136" y="2990088"/>
-            <a:ext cx="4526280" cy="402335"/>
+            <a:ext cx="4526280" cy="274320"/>
           </a:xfrm>
           <a:prstGeom prst="rect">
             <a:avLst/>
@@ -18548,7 +18548,7 @@
         </p:nvSpPr>
         <p:spPr>
           <a:xfrm>
-            <a:off x="685800" y="3547872"/>
+            <a:off x="685800" y="3611880"/>
             <a:ext cx="5349240" cy="365760"/>
           </a:xfrm>
           <a:prstGeom prst="roundRect">
@@ -18594,7 +18594,7 @@
         </p:nvSpPr>
         <p:spPr>
           <a:xfrm>
-            <a:off x="868680" y="3621024"/>
+            <a:off x="868680" y="3685032"/>
             <a:ext cx="777240" cy="256032"/>
           </a:xfrm>
           <a:prstGeom prst="rect">
@@ -18635,7 +18635,7 @@
         </p:nvSpPr>
         <p:spPr>
           <a:xfrm>
-            <a:off x="1737360" y="3621024"/>
+            <a:off x="1737360" y="3685032"/>
             <a:ext cx="2926080" cy="256032"/>
           </a:xfrm>
           <a:prstGeom prst="rect">
@@ -18676,7 +18676,7 @@
         </p:nvSpPr>
         <p:spPr>
           <a:xfrm>
-            <a:off x="4800600" y="3630168"/>
+            <a:off x="4800600" y="3694176"/>
             <a:ext cx="1143000" cy="256032"/>
           </a:xfrm>
           <a:prstGeom prst="rect">
@@ -18717,7 +18717,7 @@
         </p:nvSpPr>
         <p:spPr>
           <a:xfrm>
-            <a:off x="6309360" y="3547872"/>
+            <a:off x="6309360" y="3611880"/>
             <a:ext cx="5349240" cy="365760"/>
           </a:xfrm>
           <a:prstGeom prst="roundRect">
@@ -18763,7 +18763,7 @@
         </p:nvSpPr>
         <p:spPr>
           <a:xfrm>
-            <a:off x="6492240" y="3621024"/>
+            <a:off x="6492240" y="3685032"/>
             <a:ext cx="777240" cy="256032"/>
           </a:xfrm>
           <a:prstGeom prst="rect">
@@ -18804,7 +18804,7 @@
         </p:nvSpPr>
         <p:spPr>
           <a:xfrm>
-            <a:off x="7360920" y="3621024"/>
+            <a:off x="7360920" y="3685032"/>
             <a:ext cx="2926080" cy="256032"/>
           </a:xfrm>
           <a:prstGeom prst="rect">
@@ -18845,7 +18845,7 @@
         </p:nvSpPr>
         <p:spPr>
           <a:xfrm>
-            <a:off x="10424160" y="3630168"/>
+            <a:off x="10424160" y="3694176"/>
             <a:ext cx="1143000" cy="256032"/>
           </a:xfrm>
           <a:prstGeom prst="rect">
@@ -18886,7 +18886,7 @@
         </p:nvSpPr>
         <p:spPr>
           <a:xfrm>
-            <a:off x="685800" y="3959352"/>
+            <a:off x="685800" y="4023360"/>
             <a:ext cx="5349240" cy="365760"/>
           </a:xfrm>
           <a:prstGeom prst="roundRect">
@@ -18932,7 +18932,7 @@
         </p:nvSpPr>
         <p:spPr>
           <a:xfrm>
-            <a:off x="868680" y="4032504"/>
+            <a:off x="868680" y="4096512"/>
             <a:ext cx="777240" cy="256032"/>
           </a:xfrm>
           <a:prstGeom prst="rect">
@@ -18973,7 +18973,7 @@
         </p:nvSpPr>
         <p:spPr>
           <a:xfrm>
-            <a:off x="1737360" y="4032504"/>
+            <a:off x="1737360" y="4096512"/>
             <a:ext cx="2926080" cy="256032"/>
           </a:xfrm>
           <a:prstGeom prst="rect">
@@ -19014,7 +19014,7 @@
         </p:nvSpPr>
         <p:spPr>
           <a:xfrm>
-            <a:off x="4800600" y="4041648"/>
+            <a:off x="4800600" y="4105656"/>
             <a:ext cx="1143000" cy="256032"/>
           </a:xfrm>
           <a:prstGeom prst="rect">
@@ -19055,7 +19055,7 @@
         </p:nvSpPr>
         <p:spPr>
           <a:xfrm>
-            <a:off x="6309360" y="3959352"/>
+            <a:off x="6309360" y="4023360"/>
             <a:ext cx="5349240" cy="365760"/>
           </a:xfrm>
           <a:prstGeom prst="roundRect">
@@ -19101,7 +19101,7 @@
         </p:nvSpPr>
         <p:spPr>
           <a:xfrm>
-            <a:off x="6492240" y="4032504"/>
+            <a:off x="6492240" y="4096512"/>
             <a:ext cx="777240" cy="256032"/>
           </a:xfrm>
           <a:prstGeom prst="rect">
@@ -19142,7 +19142,7 @@
         </p:nvSpPr>
         <p:spPr>
           <a:xfrm>
-            <a:off x="7360920" y="4032504"/>
+            <a:off x="7360920" y="4096512"/>
             <a:ext cx="2926080" cy="256032"/>
           </a:xfrm>
           <a:prstGeom prst="rect">
@@ -19183,7 +19183,7 @@
         </p:nvSpPr>
         <p:spPr>
           <a:xfrm>
-            <a:off x="10424160" y="4041648"/>
+            <a:off x="10424160" y="4105656"/>
             <a:ext cx="1143000" cy="256032"/>
           </a:xfrm>
           <a:prstGeom prst="rect">
@@ -19224,7 +19224,7 @@
         </p:nvSpPr>
         <p:spPr>
           <a:xfrm>
-            <a:off x="685800" y="4370832"/>
+            <a:off x="685800" y="4434840"/>
             <a:ext cx="5349240" cy="365760"/>
           </a:xfrm>
           <a:prstGeom prst="roundRect">
@@ -19270,7 +19270,7 @@
         </p:nvSpPr>
         <p:spPr>
           <a:xfrm>
-            <a:off x="868680" y="4443984"/>
+            <a:off x="868680" y="4507992"/>
             <a:ext cx="777240" cy="256032"/>
           </a:xfrm>
           <a:prstGeom prst="rect">
@@ -19311,7 +19311,7 @@
         </p:nvSpPr>
         <p:spPr>
           <a:xfrm>
-            <a:off x="1737360" y="4443984"/>
+            <a:off x="1737360" y="4507992"/>
             <a:ext cx="2926080" cy="256032"/>
           </a:xfrm>
           <a:prstGeom prst="rect">
@@ -19352,7 +19352,7 @@
         </p:nvSpPr>
         <p:spPr>
           <a:xfrm>
-            <a:off x="4800600" y="4453128"/>
+            <a:off x="4800600" y="4517136"/>
             <a:ext cx="1143000" cy="256032"/>
           </a:xfrm>
           <a:prstGeom prst="rect">
@@ -19393,7 +19393,7 @@
         </p:nvSpPr>
         <p:spPr>
           <a:xfrm>
-            <a:off x="6309360" y="4370832"/>
+            <a:off x="6309360" y="4434840"/>
             <a:ext cx="5349240" cy="365760"/>
           </a:xfrm>
           <a:prstGeom prst="roundRect">
@@ -19439,7 +19439,7 @@
         </p:nvSpPr>
         <p:spPr>
           <a:xfrm>
-            <a:off x="6492240" y="4443984"/>
+            <a:off x="6492240" y="4507992"/>
             <a:ext cx="777240" cy="256032"/>
           </a:xfrm>
           <a:prstGeom prst="rect">
@@ -19480,7 +19480,7 @@
         </p:nvSpPr>
         <p:spPr>
           <a:xfrm>
-            <a:off x="7360920" y="4443984"/>
+            <a:off x="7360920" y="4507992"/>
             <a:ext cx="2926080" cy="256032"/>
           </a:xfrm>
           <a:prstGeom prst="rect">
@@ -19521,7 +19521,7 @@
         </p:nvSpPr>
         <p:spPr>
           <a:xfrm>
-            <a:off x="10424160" y="4453128"/>
+            <a:off x="10424160" y="4517136"/>
             <a:ext cx="1143000" cy="256032"/>
           </a:xfrm>
           <a:prstGeom prst="rect">
@@ -19562,7 +19562,7 @@
         </p:nvSpPr>
         <p:spPr>
           <a:xfrm>
-            <a:off x="685800" y="4782312"/>
+            <a:off x="685800" y="4846320"/>
             <a:ext cx="5349240" cy="365760"/>
           </a:xfrm>
           <a:prstGeom prst="roundRect">
@@ -19608,7 +19608,7 @@
         </p:nvSpPr>
         <p:spPr>
           <a:xfrm>
-            <a:off x="868680" y="4855464"/>
+            <a:off x="868680" y="4919472"/>
             <a:ext cx="777240" cy="256032"/>
           </a:xfrm>
           <a:prstGeom prst="rect">
@@ -19649,7 +19649,7 @@
         </p:nvSpPr>
         <p:spPr>
           <a:xfrm>
-            <a:off x="1737360" y="4855464"/>
+            <a:off x="1737360" y="4919472"/>
             <a:ext cx="2926080" cy="256032"/>
           </a:xfrm>
           <a:prstGeom prst="rect">
@@ -19690,7 +19690,7 @@
         </p:nvSpPr>
         <p:spPr>
           <a:xfrm>
-            <a:off x="4800600" y="4864608"/>
+            <a:off x="4800600" y="4928616"/>
             <a:ext cx="1143000" cy="256032"/>
           </a:xfrm>
           <a:prstGeom prst="rect">
@@ -19731,7 +19731,7 @@
         </p:nvSpPr>
         <p:spPr>
           <a:xfrm>
-            <a:off x="6309360" y="4782312"/>
+            <a:off x="6309360" y="4846320"/>
             <a:ext cx="5349240" cy="365760"/>
           </a:xfrm>
           <a:prstGeom prst="roundRect">
@@ -19777,7 +19777,7 @@
         </p:nvSpPr>
         <p:spPr>
           <a:xfrm>
-            <a:off x="6492240" y="4855464"/>
+            <a:off x="6492240" y="4919472"/>
             <a:ext cx="777240" cy="256032"/>
           </a:xfrm>
           <a:prstGeom prst="rect">
@@ -19818,7 +19818,7 @@
         </p:nvSpPr>
         <p:spPr>
           <a:xfrm>
-            <a:off x="7360920" y="4855464"/>
+            <a:off x="7360920" y="4919472"/>
             <a:ext cx="2926080" cy="256032"/>
           </a:xfrm>
           <a:prstGeom prst="rect">
@@ -19859,7 +19859,7 @@
         </p:nvSpPr>
         <p:spPr>
           <a:xfrm>
-            <a:off x="10424160" y="4864608"/>
+            <a:off x="10424160" y="4928616"/>
             <a:ext cx="1143000" cy="256032"/>
           </a:xfrm>
           <a:prstGeom prst="rect">
@@ -19900,7 +19900,7 @@
         </p:nvSpPr>
         <p:spPr>
           <a:xfrm>
-            <a:off x="685800" y="5193792"/>
+            <a:off x="685800" y="5257800"/>
             <a:ext cx="5349240" cy="365760"/>
           </a:xfrm>
           <a:prstGeom prst="roundRect">
@@ -19946,7 +19946,7 @@
         </p:nvSpPr>
         <p:spPr>
           <a:xfrm>
-            <a:off x="868680" y="5266944"/>
+            <a:off x="868680" y="5330952"/>
             <a:ext cx="777240" cy="256032"/>
           </a:xfrm>
           <a:prstGeom prst="rect">
@@ -19987,7 +19987,7 @@
         </p:nvSpPr>
         <p:spPr>
           <a:xfrm>
-            <a:off x="1737360" y="5266944"/>
+            <a:off x="1737360" y="5330952"/>
             <a:ext cx="2926080" cy="256032"/>
           </a:xfrm>
           <a:prstGeom prst="rect">
@@ -20028,7 +20028,7 @@
         </p:nvSpPr>
         <p:spPr>
           <a:xfrm>
-            <a:off x="4800600" y="5276088"/>
+            <a:off x="4800600" y="5340096"/>
             <a:ext cx="1143000" cy="256032"/>
           </a:xfrm>
           <a:prstGeom prst="rect">
@@ -20317,7 +20317,7 @@
                 <a:ea typeface="Consolas"/>
                 <a:cs typeface="Consolas"/>
               </a:rPr>
-              <a:t>+  tools/thinking_sweep.py    —  사고 예산만 바꿔 5단 스윕   (슬라이드 25 · 240배, gemini-25 단가 환산)</a:t>
+              <a:t>+  tools/thinking_sweep.py    —  사고 예산만 바꿔 5단 스윕   (보너스 덱 · 240배, gemini-25 단가 환산)</a:t>
             </a:r>
           </a:p>
         </p:txBody>
@@ -25755,7 +25755,7 @@
                 <a:ea typeface="Consolas"/>
                 <a:cs typeface="Consolas"/>
               </a:rPr>
-              <a:t>SDD 반증 근거 — 슬라이드 15</a:t>
+              <a:t>SDD 반증 근거 — 보너스 덱</a:t>
             </a:r>
           </a:p>
         </p:txBody>
